--- a/week11/Ouspenskaia_Project2.pptx
+++ b/week11/Ouspenskaia_Project2.pptx
@@ -5,15 +5,18 @@
     <p:sldMasterId id="2147483648" r:id="rId1"/>
   </p:sldMasterIdLst>
   <p:notesMasterIdLst>
-    <p:notesMasterId r:id="rId8"/>
+    <p:notesMasterId r:id="rId11"/>
   </p:notesMasterIdLst>
   <p:sldIdLst>
     <p:sldId id="256" r:id="rId2"/>
     <p:sldId id="257" r:id="rId3"/>
-    <p:sldId id="258" r:id="rId4"/>
-    <p:sldId id="259" r:id="rId5"/>
-    <p:sldId id="261" r:id="rId6"/>
-    <p:sldId id="260" r:id="rId7"/>
+    <p:sldId id="262" r:id="rId4"/>
+    <p:sldId id="263" r:id="rId5"/>
+    <p:sldId id="264" r:id="rId6"/>
+    <p:sldId id="258" r:id="rId7"/>
+    <p:sldId id="259" r:id="rId8"/>
+    <p:sldId id="261" r:id="rId9"/>
+    <p:sldId id="265" r:id="rId10"/>
   </p:sldIdLst>
   <p:sldSz cx="12192000" cy="6858000"/>
   <p:notesSz cx="6858000" cy="9144000"/>
@@ -3824,56 +3827,6 @@
           <a:chExt cx="0" cy="0"/>
         </a:xfrm>
       </p:grpSpPr>
-      <p:sp>
-        <p:nvSpPr>
-          <p:cNvPr id="2" name="Title 1">
-            <a:extLst>
-              <a:ext uri="{FF2B5EF4-FFF2-40B4-BE49-F238E27FC236}">
-                <a16:creationId xmlns:a16="http://schemas.microsoft.com/office/drawing/2014/main" id="{3A9CFF5B-0066-0A0B-08F3-5E8254BA128C}"/>
-              </a:ext>
-            </a:extLst>
-          </p:cNvPr>
-          <p:cNvSpPr>
-            <a:spLocks noGrp="1"/>
-          </p:cNvSpPr>
-          <p:nvPr>
-            <p:ph type="ctrTitle"/>
-          </p:nvPr>
-        </p:nvSpPr>
-        <p:spPr/>
-        <p:txBody>
-          <a:bodyPr/>
-          <a:lstStyle/>
-          <a:p>
-            <a:endParaRPr lang="en-US" dirty="0"/>
-          </a:p>
-        </p:txBody>
-      </p:sp>
-      <p:sp>
-        <p:nvSpPr>
-          <p:cNvPr id="3" name="Subtitle 2">
-            <a:extLst>
-              <a:ext uri="{FF2B5EF4-FFF2-40B4-BE49-F238E27FC236}">
-                <a16:creationId xmlns:a16="http://schemas.microsoft.com/office/drawing/2014/main" id="{CFC14612-3946-CF00-5A0B-96AE52F80E21}"/>
-              </a:ext>
-            </a:extLst>
-          </p:cNvPr>
-          <p:cNvSpPr>
-            <a:spLocks noGrp="1"/>
-          </p:cNvSpPr>
-          <p:nvPr>
-            <p:ph type="subTitle" idx="1"/>
-          </p:nvPr>
-        </p:nvSpPr>
-        <p:spPr/>
-        <p:txBody>
-          <a:bodyPr/>
-          <a:lstStyle/>
-          <a:p>
-            <a:endParaRPr lang="en-US"/>
-          </a:p>
-        </p:txBody>
-      </p:sp>
       <p:pic>
         <p:nvPicPr>
           <p:cNvPr id="5" name="Picture 4">
@@ -3918,8 +3871,8 @@
         </p:nvSpPr>
         <p:spPr>
           <a:xfrm>
-            <a:off x="4303528" y="5735637"/>
-            <a:ext cx="6097772" cy="646331"/>
+            <a:off x="7764162" y="5773301"/>
+            <a:ext cx="4305300" cy="646331"/>
           </a:xfrm>
           <a:prstGeom prst="rect">
             <a:avLst/>
@@ -4024,7 +3977,59 @@
           <a:p>
             <a:r>
               <a:rPr lang="en-US" dirty="0"/>
-              <a:t>Palmer Penguins</a:t>
+              <a:t>        Palmer Penguins</a:t>
+            </a:r>
+          </a:p>
+        </p:txBody>
+      </p:sp>
+      <p:sp>
+        <p:nvSpPr>
+          <p:cNvPr id="9" name="TextBox 8">
+            <a:extLst>
+              <a:ext uri="{FF2B5EF4-FFF2-40B4-BE49-F238E27FC236}">
+                <a16:creationId xmlns:a16="http://schemas.microsoft.com/office/drawing/2014/main" id="{F9B93901-6823-D8EF-198F-B1678057912E}"/>
+              </a:ext>
+            </a:extLst>
+          </p:cNvPr>
+          <p:cNvSpPr txBox="1"/>
+          <p:nvPr/>
+        </p:nvSpPr>
+        <p:spPr>
+          <a:xfrm>
+            <a:off x="963827" y="5753418"/>
+            <a:ext cx="5325762" cy="923330"/>
+          </a:xfrm>
+          <a:prstGeom prst="rect">
+            <a:avLst/>
+          </a:prstGeom>
+          <a:noFill/>
+        </p:spPr>
+        <p:txBody>
+          <a:bodyPr wrap="square" rtlCol="0">
+            <a:spAutoFit/>
+          </a:bodyPr>
+          <a:lstStyle/>
+          <a:p>
+            <a:r>
+              <a:rPr lang="en-US" dirty="0"/>
+              <a:t>Alissa </a:t>
+            </a:r>
+            <a:r>
+              <a:rPr lang="en-US" dirty="0" err="1"/>
+              <a:t>Ouspenskaia</a:t>
+            </a:r>
+            <a:endParaRPr lang="en-US" dirty="0"/>
+          </a:p>
+          <a:p>
+            <a:r>
+              <a:rPr lang="en-US" dirty="0"/>
+              <a:t>DATA 201</a:t>
+            </a:r>
+          </a:p>
+          <a:p>
+            <a:r>
+              <a:rPr lang="en-US" dirty="0"/>
+              <a:t>Montgomery College Spring 2026</a:t>
             </a:r>
           </a:p>
         </p:txBody>
@@ -4059,31 +4064,6 @@
           <a:chExt cx="0" cy="0"/>
         </a:xfrm>
       </p:grpSpPr>
-      <p:sp>
-        <p:nvSpPr>
-          <p:cNvPr id="2" name="Title 1">
-            <a:extLst>
-              <a:ext uri="{FF2B5EF4-FFF2-40B4-BE49-F238E27FC236}">
-                <a16:creationId xmlns:a16="http://schemas.microsoft.com/office/drawing/2014/main" id="{E8021F3F-11AF-49DC-63E2-2568DD0E956A}"/>
-              </a:ext>
-            </a:extLst>
-          </p:cNvPr>
-          <p:cNvSpPr>
-            <a:spLocks noGrp="1"/>
-          </p:cNvSpPr>
-          <p:nvPr>
-            <p:ph type="title"/>
-          </p:nvPr>
-        </p:nvSpPr>
-        <p:spPr/>
-        <p:txBody>
-          <a:bodyPr/>
-          <a:lstStyle/>
-          <a:p>
-            <a:endParaRPr lang="en-US" dirty="0"/>
-          </a:p>
-        </p:txBody>
-      </p:sp>
       <p:pic>
         <p:nvPicPr>
           <p:cNvPr id="9" name="Content Placeholder 8">
@@ -4108,7 +4088,7 @@
         </p:blipFill>
         <p:spPr>
           <a:xfrm>
-            <a:off x="1338013" y="365125"/>
+            <a:off x="1516553" y="538120"/>
             <a:ext cx="9837247" cy="4351338"/>
           </a:xfrm>
           <a:prstGeom prst="rect">
@@ -4236,6 +4216,218 @@
           <a:chExt cx="0" cy="0"/>
         </a:xfrm>
       </p:grpSpPr>
+      <p:pic>
+        <p:nvPicPr>
+          <p:cNvPr id="4" name="Content Placeholder 3">
+            <a:extLst>
+              <a:ext uri="{FF2B5EF4-FFF2-40B4-BE49-F238E27FC236}">
+                <a16:creationId xmlns:a16="http://schemas.microsoft.com/office/drawing/2014/main" id="{0D0FDE74-2EEC-725C-C841-092FEE5C88F0}"/>
+              </a:ext>
+            </a:extLst>
+          </p:cNvPr>
+          <p:cNvPicPr>
+            <a:picLocks noGrp="1" noChangeAspect="1"/>
+          </p:cNvPicPr>
+          <p:nvPr>
+            <p:ph idx="1"/>
+          </p:nvPr>
+        </p:nvPicPr>
+        <p:blipFill>
+          <a:blip r:embed="rId2"/>
+          <a:stretch>
+            <a:fillRect/>
+          </a:stretch>
+        </p:blipFill>
+        <p:spPr>
+          <a:xfrm>
+            <a:off x="827930" y="580768"/>
+            <a:ext cx="10536139" cy="5128054"/>
+          </a:xfrm>
+          <a:prstGeom prst="rect">
+            <a:avLst/>
+          </a:prstGeom>
+        </p:spPr>
+      </p:pic>
+    </p:spTree>
+    <p:extLst>
+      <p:ext uri="{BB962C8B-B14F-4D97-AF65-F5344CB8AC3E}">
+        <p14:creationId xmlns:p14="http://schemas.microsoft.com/office/powerpoint/2010/main" val="1131004295"/>
+      </p:ext>
+    </p:extLst>
+  </p:cSld>
+  <p:clrMapOvr>
+    <a:masterClrMapping/>
+  </p:clrMapOvr>
+</p:sld>
+</file>
+
+<file path=ppt/slides/slide4.xml><?xml version="1.0" encoding="utf-8"?>
+<p:sld xmlns:a="http://schemas.openxmlformats.org/drawingml/2006/main" xmlns:r="http://schemas.openxmlformats.org/officeDocument/2006/relationships" xmlns:p="http://schemas.openxmlformats.org/presentationml/2006/main">
+  <p:cSld>
+    <p:spTree>
+      <p:nvGrpSpPr>
+        <p:cNvPr id="1" name=""/>
+        <p:cNvGrpSpPr/>
+        <p:nvPr/>
+      </p:nvGrpSpPr>
+      <p:grpSpPr>
+        <a:xfrm>
+          <a:off x="0" y="0"/>
+          <a:ext cx="0" cy="0"/>
+          <a:chOff x="0" y="0"/>
+          <a:chExt cx="0" cy="0"/>
+        </a:xfrm>
+      </p:grpSpPr>
+      <p:pic>
+        <p:nvPicPr>
+          <p:cNvPr id="4" name="Picture 3">
+            <a:extLst>
+              <a:ext uri="{FF2B5EF4-FFF2-40B4-BE49-F238E27FC236}">
+                <a16:creationId xmlns:a16="http://schemas.microsoft.com/office/drawing/2014/main" id="{494C5045-1733-EC22-9C51-E9FBD7106D80}"/>
+              </a:ext>
+            </a:extLst>
+          </p:cNvPr>
+          <p:cNvPicPr>
+            <a:picLocks noChangeAspect="1"/>
+          </p:cNvPicPr>
+          <p:nvPr/>
+        </p:nvPicPr>
+        <p:blipFill>
+          <a:blip r:embed="rId2"/>
+          <a:stretch>
+            <a:fillRect/>
+          </a:stretch>
+        </p:blipFill>
+        <p:spPr>
+          <a:xfrm>
+            <a:off x="1221258" y="267307"/>
+            <a:ext cx="8342871" cy="6177371"/>
+          </a:xfrm>
+          <a:prstGeom prst="rect">
+            <a:avLst/>
+          </a:prstGeom>
+        </p:spPr>
+      </p:pic>
+    </p:spTree>
+    <p:extLst>
+      <p:ext uri="{BB962C8B-B14F-4D97-AF65-F5344CB8AC3E}">
+        <p14:creationId xmlns:p14="http://schemas.microsoft.com/office/powerpoint/2010/main" val="1784692422"/>
+      </p:ext>
+    </p:extLst>
+  </p:cSld>
+  <p:clrMapOvr>
+    <a:masterClrMapping/>
+  </p:clrMapOvr>
+</p:sld>
+</file>
+
+<file path=ppt/slides/slide5.xml><?xml version="1.0" encoding="utf-8"?>
+<p:sld xmlns:a="http://schemas.openxmlformats.org/drawingml/2006/main" xmlns:r="http://schemas.openxmlformats.org/officeDocument/2006/relationships" xmlns:p="http://schemas.openxmlformats.org/presentationml/2006/main">
+  <p:cSld>
+    <p:spTree>
+      <p:nvGrpSpPr>
+        <p:cNvPr id="1" name=""/>
+        <p:cNvGrpSpPr/>
+        <p:nvPr/>
+      </p:nvGrpSpPr>
+      <p:grpSpPr>
+        <a:xfrm>
+          <a:off x="0" y="0"/>
+          <a:ext cx="0" cy="0"/>
+          <a:chOff x="0" y="0"/>
+          <a:chExt cx="0" cy="0"/>
+        </a:xfrm>
+      </p:grpSpPr>
+      <p:pic>
+        <p:nvPicPr>
+          <p:cNvPr id="4" name="Picture 3">
+            <a:extLst>
+              <a:ext uri="{FF2B5EF4-FFF2-40B4-BE49-F238E27FC236}">
+                <a16:creationId xmlns:a16="http://schemas.microsoft.com/office/drawing/2014/main" id="{94EC5CAF-7389-A63E-AE93-1223EAA55126}"/>
+              </a:ext>
+            </a:extLst>
+          </p:cNvPr>
+          <p:cNvPicPr>
+            <a:picLocks noChangeAspect="1"/>
+          </p:cNvPicPr>
+          <p:nvPr/>
+        </p:nvPicPr>
+        <p:blipFill>
+          <a:blip r:embed="rId2"/>
+          <a:stretch>
+            <a:fillRect/>
+          </a:stretch>
+        </p:blipFill>
+        <p:spPr>
+          <a:xfrm>
+            <a:off x="0" y="0"/>
+            <a:ext cx="7783652" cy="5878792"/>
+          </a:xfrm>
+          <a:prstGeom prst="rect">
+            <a:avLst/>
+          </a:prstGeom>
+        </p:spPr>
+      </p:pic>
+      <p:pic>
+        <p:nvPicPr>
+          <p:cNvPr id="5" name="Picture 4">
+            <a:extLst>
+              <a:ext uri="{FF2B5EF4-FFF2-40B4-BE49-F238E27FC236}">
+                <a16:creationId xmlns:a16="http://schemas.microsoft.com/office/drawing/2014/main" id="{A149A9C7-CF23-8F58-4AC2-FD39F784FE38}"/>
+              </a:ext>
+            </a:extLst>
+          </p:cNvPr>
+          <p:cNvPicPr>
+            <a:picLocks noChangeAspect="1"/>
+          </p:cNvPicPr>
+          <p:nvPr/>
+        </p:nvPicPr>
+        <p:blipFill>
+          <a:blip r:embed="rId3"/>
+          <a:stretch>
+            <a:fillRect/>
+          </a:stretch>
+        </p:blipFill>
+        <p:spPr>
+          <a:xfrm>
+            <a:off x="7239000" y="1963351"/>
+            <a:ext cx="4953000" cy="2387600"/>
+          </a:xfrm>
+          <a:prstGeom prst="rect">
+            <a:avLst/>
+          </a:prstGeom>
+        </p:spPr>
+      </p:pic>
+    </p:spTree>
+    <p:extLst>
+      <p:ext uri="{BB962C8B-B14F-4D97-AF65-F5344CB8AC3E}">
+        <p14:creationId xmlns:p14="http://schemas.microsoft.com/office/powerpoint/2010/main" val="841334160"/>
+      </p:ext>
+    </p:extLst>
+  </p:cSld>
+  <p:clrMapOvr>
+    <a:masterClrMapping/>
+  </p:clrMapOvr>
+</p:sld>
+</file>
+
+<file path=ppt/slides/slide6.xml><?xml version="1.0" encoding="utf-8"?>
+<p:sld xmlns:a="http://schemas.openxmlformats.org/drawingml/2006/main" xmlns:r="http://schemas.openxmlformats.org/officeDocument/2006/relationships" xmlns:p="http://schemas.openxmlformats.org/presentationml/2006/main">
+  <p:cSld>
+    <p:spTree>
+      <p:nvGrpSpPr>
+        <p:cNvPr id="1" name=""/>
+        <p:cNvGrpSpPr/>
+        <p:nvPr/>
+      </p:nvGrpSpPr>
+      <p:grpSpPr>
+        <a:xfrm>
+          <a:off x="0" y="0"/>
+          <a:ext cx="0" cy="0"/>
+          <a:chOff x="0" y="0"/>
+          <a:chExt cx="0" cy="0"/>
+        </a:xfrm>
+      </p:grpSpPr>
       <p:sp>
         <p:nvSpPr>
           <p:cNvPr id="2" name="Title 1">
@@ -4320,7 +4512,7 @@
 </p:sld>
 </file>
 
-<file path=ppt/slides/slide4.xml><?xml version="1.0" encoding="utf-8"?>
+<file path=ppt/slides/slide7.xml><?xml version="1.0" encoding="utf-8"?>
 <p:sld xmlns:a="http://schemas.openxmlformats.org/drawingml/2006/main" xmlns:r="http://schemas.openxmlformats.org/officeDocument/2006/relationships" xmlns:p="http://schemas.openxmlformats.org/presentationml/2006/main">
   <p:cSld>
     <p:spTree>
@@ -4421,7 +4613,7 @@
 </p:sld>
 </file>
 
-<file path=ppt/slides/slide5.xml><?xml version="1.0" encoding="utf-8"?>
+<file path=ppt/slides/slide8.xml><?xml version="1.0" encoding="utf-8"?>
 <p:sld xmlns:a="http://schemas.openxmlformats.org/drawingml/2006/main" xmlns:r="http://schemas.openxmlformats.org/officeDocument/2006/relationships" xmlns:p="http://schemas.openxmlformats.org/presentationml/2006/main">
   <p:cSld>
     <p:spTree>
@@ -4438,110 +4630,1168 @@
           <a:chExt cx="0" cy="0"/>
         </a:xfrm>
       </p:grpSpPr>
-      <p:sp>
-        <p:nvSpPr>
-          <p:cNvPr id="2" name="Title 1">
-            <a:extLst>
-              <a:ext uri="{FF2B5EF4-FFF2-40B4-BE49-F238E27FC236}">
-                <a16:creationId xmlns:a16="http://schemas.microsoft.com/office/drawing/2014/main" id="{B652D673-447D-B79F-46FE-1F809A6FDE0B}"/>
-              </a:ext>
-            </a:extLst>
-          </p:cNvPr>
-          <p:cNvSpPr>
-            <a:spLocks noGrp="1"/>
-          </p:cNvSpPr>
-          <p:nvPr>
-            <p:ph type="title"/>
-          </p:nvPr>
-        </p:nvSpPr>
-        <p:spPr/>
-        <p:txBody>
-          <a:bodyPr/>
+      <mc:AlternateContent xmlns:mc="http://schemas.openxmlformats.org/markup-compatibility/2006">
+        <mc:Choice xmlns:a14="http://schemas.microsoft.com/office/drawing/2010/main" Requires="a14">
+          <p:sp>
+            <p:nvSpPr>
+              <p:cNvPr id="3" name="Content Placeholder 2">
+                <a:extLst>
+                  <a:ext uri="{FF2B5EF4-FFF2-40B4-BE49-F238E27FC236}">
+                    <a16:creationId xmlns:a16="http://schemas.microsoft.com/office/drawing/2014/main" id="{815CC845-7034-43CC-8A9C-914150B30D68}"/>
+                  </a:ext>
+                </a:extLst>
+              </p:cNvPr>
+              <p:cNvSpPr>
+                <a:spLocks noGrp="1"/>
+              </p:cNvSpPr>
+              <p:nvPr>
+                <p:ph idx="1"/>
+              </p:nvPr>
+            </p:nvSpPr>
+            <p:spPr>
+              <a:xfrm>
+                <a:off x="838199" y="664090"/>
+                <a:ext cx="10678297" cy="4921164"/>
+              </a:xfrm>
+            </p:spPr>
+            <p:txBody>
+              <a:bodyPr>
+                <a:normAutofit/>
+              </a:bodyPr>
+              <a:lstStyle/>
+              <a:p>
+                <a:pPr marL="0" indent="0">
+                  <a:buNone/>
+                </a:pPr>
+                <a:r>
+                  <a:rPr lang="en-US" dirty="0"/>
+                  <a:t>For predicting body mass, the best model of those attempted is </a:t>
+                </a:r>
+              </a:p>
+              <a:p>
+                <a:pPr marL="0" indent="0">
+                  <a:buNone/>
+                </a:pPr>
+                <a:endParaRPr lang="en-US" sz="2600" i="0" dirty="0">
+                  <a:latin typeface="Cambria Math" panose="02040503050406030204" pitchFamily="18" charset="0"/>
+                </a:endParaRPr>
+              </a:p>
+              <a:p>
+                <a:pPr marL="0" indent="0">
+                  <a:buNone/>
+                </a:pPr>
+                <a:endParaRPr lang="en-US" sz="2600" i="0" dirty="0">
+                  <a:latin typeface="Cambria Math" panose="02040503050406030204" pitchFamily="18" charset="0"/>
+                </a:endParaRPr>
+              </a:p>
+              <a:p>
+                <a:pPr marL="0" indent="0">
+                  <a:buNone/>
+                </a:pPr>
+                <a14:m>
+                  <m:oMathPara xmlns:m="http://schemas.openxmlformats.org/officeDocument/2006/math">
+                    <m:oMathParaPr>
+                      <m:jc m:val="centerGroup"/>
+                    </m:oMathParaPr>
+                    <m:oMath xmlns:m="http://schemas.openxmlformats.org/officeDocument/2006/math">
+                      <m:r>
+                        <m:rPr>
+                          <m:nor/>
+                        </m:rPr>
+                        <a:rPr lang="en-US" sz="2600" i="0" smtClean="0">
+                          <a:latin typeface="Cambria Math" panose="02040503050406030204" pitchFamily="18" charset="0"/>
+                        </a:rPr>
+                        <m:t>body</m:t>
+                      </m:r>
+                      <m:r>
+                        <m:rPr>
+                          <m:nor/>
+                        </m:rPr>
+                        <a:rPr lang="en-US" sz="2600" i="0" smtClean="0">
+                          <a:latin typeface="Cambria Math" panose="02040503050406030204" pitchFamily="18" charset="0"/>
+                        </a:rPr>
+                        <m:t>_</m:t>
+                      </m:r>
+                      <m:r>
+                        <m:rPr>
+                          <m:nor/>
+                        </m:rPr>
+                        <a:rPr lang="en-US" sz="2600" i="0" smtClean="0">
+                          <a:latin typeface="Cambria Math" panose="02040503050406030204" pitchFamily="18" charset="0"/>
+                        </a:rPr>
+                        <m:t>mass</m:t>
+                      </m:r>
+                      <m:r>
+                        <a:rPr lang="en-US" sz="2600" i="1">
+                          <a:latin typeface="Cambria Math" panose="02040503050406030204" pitchFamily="18" charset="0"/>
+                        </a:rPr>
+                        <m:t>=2169.27+32.54</m:t>
+                      </m:r>
+                      <m:d>
+                        <m:dPr>
+                          <m:ctrlPr>
+                            <a:rPr lang="en-US" sz="2600" i="1">
+                              <a:latin typeface="Cambria Math" panose="02040503050406030204" pitchFamily="18" charset="0"/>
+                            </a:rPr>
+                          </m:ctrlPr>
+                        </m:dPr>
+                        <m:e>
+                          <m:r>
+                            <m:rPr>
+                              <m:nor/>
+                            </m:rPr>
+                            <a:rPr lang="en-US" sz="2600" i="0">
+                              <a:latin typeface="Cambria Math" panose="02040503050406030204" pitchFamily="18" charset="0"/>
+                            </a:rPr>
+                            <m:t>bill</m:t>
+                          </m:r>
+                          <m:r>
+                            <m:rPr>
+                              <m:nor/>
+                            </m:rPr>
+                            <a:rPr lang="en-US" sz="2600" i="0">
+                              <a:latin typeface="Cambria Math" panose="02040503050406030204" pitchFamily="18" charset="0"/>
+                            </a:rPr>
+                            <m:t>_</m:t>
+                          </m:r>
+                          <m:r>
+                            <m:rPr>
+                              <m:nor/>
+                            </m:rPr>
+                            <a:rPr lang="en-US" sz="2600" i="0">
+                              <a:latin typeface="Cambria Math" panose="02040503050406030204" pitchFamily="18" charset="0"/>
+                            </a:rPr>
+                            <m:t>length</m:t>
+                          </m:r>
+                        </m:e>
+                      </m:d>
+                      <m:r>
+                        <a:rPr lang="en-US" sz="2600" i="1">
+                          <a:latin typeface="Cambria Math" panose="02040503050406030204" pitchFamily="18" charset="0"/>
+                        </a:rPr>
+                        <m:t>−298.77</m:t>
+                      </m:r>
+                      <m:d>
+                        <m:dPr>
+                          <m:ctrlPr>
+                            <a:rPr lang="en-US" sz="2600" i="1">
+                              <a:latin typeface="Cambria Math" panose="02040503050406030204" pitchFamily="18" charset="0"/>
+                            </a:rPr>
+                          </m:ctrlPr>
+                        </m:dPr>
+                        <m:e>
+                          <m:r>
+                            <m:rPr>
+                              <m:nor/>
+                            </m:rPr>
+                            <a:rPr lang="en-US" sz="2600" i="0">
+                              <a:latin typeface="Cambria Math" panose="02040503050406030204" pitchFamily="18" charset="0"/>
+                            </a:rPr>
+                            <m:t>chinstrap</m:t>
+                          </m:r>
+                        </m:e>
+                      </m:d>
+                    </m:oMath>
+                  </m:oMathPara>
+                </a14:m>
+                <a:endParaRPr lang="en-US" sz="2600" i="1" dirty="0">
+                  <a:latin typeface="Cambria Math" panose="02040503050406030204" pitchFamily="18" charset="0"/>
+                </a:endParaRPr>
+              </a:p>
+              <a:p>
+                <a:pPr marL="0" indent="0">
+                  <a:buNone/>
+                </a:pPr>
+                <a14:m>
+                  <m:oMathPara xmlns:m="http://schemas.openxmlformats.org/officeDocument/2006/math">
+                    <m:oMathParaPr>
+                      <m:jc m:val="centerGroup"/>
+                    </m:oMathParaPr>
+                    <m:oMath xmlns:m="http://schemas.openxmlformats.org/officeDocument/2006/math">
+                      <m:r>
+                        <a:rPr lang="en-US" sz="2600" i="1">
+                          <a:latin typeface="Cambria Math" panose="02040503050406030204" pitchFamily="18" charset="0"/>
+                        </a:rPr>
+                        <m:t>+1094.87</m:t>
+                      </m:r>
+                      <m:d>
+                        <m:dPr>
+                          <m:ctrlPr>
+                            <a:rPr lang="en-US" sz="2600" i="1">
+                              <a:latin typeface="Cambria Math" panose="02040503050406030204" pitchFamily="18" charset="0"/>
+                            </a:rPr>
+                          </m:ctrlPr>
+                        </m:dPr>
+                        <m:e>
+                          <m:r>
+                            <m:rPr>
+                              <m:nor/>
+                            </m:rPr>
+                            <a:rPr lang="en-US" sz="2600" i="0">
+                              <a:latin typeface="Cambria Math" panose="02040503050406030204" pitchFamily="18" charset="0"/>
+                            </a:rPr>
+                            <m:t>gentoo</m:t>
+                          </m:r>
+                        </m:e>
+                      </m:d>
+                      <m:r>
+                        <a:rPr lang="en-US" sz="2600" i="1">
+                          <a:latin typeface="Cambria Math" panose="02040503050406030204" pitchFamily="18" charset="0"/>
+                        </a:rPr>
+                        <m:t>+547.37</m:t>
+                      </m:r>
+                      <m:d>
+                        <m:dPr>
+                          <m:ctrlPr>
+                            <a:rPr lang="en-US" sz="2600" i="1">
+                              <a:latin typeface="Cambria Math" panose="02040503050406030204" pitchFamily="18" charset="0"/>
+                            </a:rPr>
+                          </m:ctrlPr>
+                        </m:dPr>
+                        <m:e>
+                          <m:r>
+                            <m:rPr>
+                              <m:nor/>
+                            </m:rPr>
+                            <a:rPr lang="en-US" sz="2600" i="0">
+                              <a:latin typeface="Cambria Math" panose="02040503050406030204" pitchFamily="18" charset="0"/>
+                            </a:rPr>
+                            <m:t>male</m:t>
+                          </m:r>
+                        </m:e>
+                      </m:d>
+                    </m:oMath>
+                  </m:oMathPara>
+                </a14:m>
+                <a:endParaRPr lang="en-US" sz="2600" dirty="0"/>
+              </a:p>
+              <a:p>
+                <a:pPr marL="0" indent="0">
+                  <a:buNone/>
+                </a:pPr>
+                <a:endParaRPr lang="en-US" sz="2600" dirty="0"/>
+              </a:p>
+              <a:p>
+                <a:pPr marL="0" indent="0">
+                  <a:buNone/>
+                </a:pPr>
+                <a:r>
+                  <a:rPr lang="en-US" sz="2400" dirty="0"/>
+                  <a:t>Where 1 indicates True for categorical variables chinstrap, gentoo, and male, and 0 indicates False. </a:t>
+                </a:r>
+                <a:br>
+                  <a:rPr lang="en-US" dirty="0"/>
+                </a:br>
+                <a:endParaRPr lang="en-US" dirty="0"/>
+              </a:p>
+              <a:p>
+                <a:pPr marL="0" indent="0">
+                  <a:buNone/>
+                </a:pPr>
+                <a:r>
+                  <a:rPr lang="en-US" sz="2400" dirty="0"/>
+                  <a:t>This model has the lowest p-values across all variables, the highest R-squared score, and the lowest RMSE. </a:t>
+                </a:r>
+                <a:endParaRPr lang="en-US" dirty="0"/>
+              </a:p>
+            </p:txBody>
+          </p:sp>
+        </mc:Choice>
+        <mc:Fallback>
+          <p:sp>
+            <p:nvSpPr>
+              <p:cNvPr id="3" name="Content Placeholder 2">
+                <a:extLst>
+                  <a:ext uri="{FF2B5EF4-FFF2-40B4-BE49-F238E27FC236}">
+                    <a16:creationId xmlns:a16="http://schemas.microsoft.com/office/drawing/2014/main" id="{815CC845-7034-43CC-8A9C-914150B30D68}"/>
+                  </a:ext>
+                </a:extLst>
+              </p:cNvPr>
+              <p:cNvSpPr>
+                <a:spLocks noGrp="1" noRot="1" noChangeAspect="1" noMove="1" noResize="1" noEditPoints="1" noAdjustHandles="1" noChangeArrowheads="1" noChangeShapeType="1" noTextEdit="1"/>
+              </p:cNvSpPr>
+              <p:nvPr>
+                <p:ph idx="1"/>
+              </p:nvPr>
+            </p:nvSpPr>
+            <p:spPr>
+              <a:xfrm>
+                <a:off x="838199" y="664090"/>
+                <a:ext cx="10678297" cy="4921164"/>
+              </a:xfrm>
+              <a:blipFill>
+                <a:blip r:embed="rId2"/>
+                <a:stretch>
+                  <a:fillRect l="-1069" t="-2062"/>
+                </a:stretch>
+              </a:blipFill>
+            </p:spPr>
+            <p:txBody>
+              <a:bodyPr/>
+              <a:lstStyle/>
+              <a:p>
+                <a:r>
+                  <a:rPr lang="en-US">
+                    <a:noFill/>
+                  </a:rPr>
+                  <a:t> </a:t>
+                </a:r>
+              </a:p>
+            </p:txBody>
+          </p:sp>
+        </mc:Fallback>
+      </mc:AlternateContent>
+      <p:sp>
+        <p:nvSpPr>
+          <p:cNvPr id="4" name="Rectangle 1">
+            <a:extLst>
+              <a:ext uri="{FF2B5EF4-FFF2-40B4-BE49-F238E27FC236}">
+                <a16:creationId xmlns:a16="http://schemas.microsoft.com/office/drawing/2014/main" id="{2666D537-1829-8891-583A-E0B0133E78BD}"/>
+              </a:ext>
+            </a:extLst>
+          </p:cNvPr>
+          <p:cNvSpPr>
+            <a:spLocks noChangeArrowheads="1"/>
+          </p:cNvSpPr>
+          <p:nvPr/>
+        </p:nvSpPr>
+        <p:spPr bwMode="auto">
+          <a:xfrm>
+            <a:off x="0" y="0"/>
+            <a:ext cx="12192000" cy="0"/>
+          </a:xfrm>
+          <a:prstGeom prst="rect">
+            <a:avLst/>
+          </a:prstGeom>
+          <a:noFill/>
+          <a:ln>
+            <a:noFill/>
+          </a:ln>
+          <a:effectLst/>
+          <a:extLst>
+            <a:ext uri="{909E8E84-426E-40DD-AFC4-6F175D3DCCD1}">
+              <a14:hiddenFill xmlns:a14="http://schemas.microsoft.com/office/drawing/2010/main">
+                <a:solidFill>
+                  <a:schemeClr val="accent1"/>
+                </a:solidFill>
+              </a14:hiddenFill>
+            </a:ext>
+            <a:ext uri="{91240B29-F687-4F45-9708-019B960494DF}">
+              <a14:hiddenLine xmlns:a14="http://schemas.microsoft.com/office/drawing/2010/main" w="9525">
+                <a:solidFill>
+                  <a:schemeClr val="tx1"/>
+                </a:solidFill>
+                <a:miter lim="800000"/>
+                <a:headEnd/>
+                <a:tailEnd/>
+              </a14:hiddenLine>
+            </a:ext>
+            <a:ext uri="{AF507438-7753-43E0-B8FC-AC1667EBCBE1}">
+              <a14:hiddenEffects xmlns:a14="http://schemas.microsoft.com/office/drawing/2010/main">
+                <a:effectLst>
+                  <a:outerShdw dist="35921" dir="2700000" algn="ctr" rotWithShape="0">
+                    <a:schemeClr val="bg2"/>
+                  </a:outerShdw>
+                </a:effectLst>
+              </a14:hiddenEffects>
+            </a:ext>
+          </a:extLst>
+        </p:spPr>
+        <p:txBody>
+          <a:bodyPr vert="horz" wrap="none" lIns="91440" tIns="45720" rIns="91440" bIns="45720" numCol="1" anchor="ctr" anchorCtr="0" compatLnSpc="1">
+            <a:prstTxWarp prst="textNoShape">
+              <a:avLst/>
+            </a:prstTxWarp>
+            <a:spAutoFit/>
+          </a:bodyPr>
           <a:lstStyle/>
           <a:p>
-            <a:endParaRPr lang="en-US"/>
-          </a:p>
-        </p:txBody>
-      </p:sp>
-      <p:sp>
-        <p:nvSpPr>
-          <p:cNvPr id="3" name="Content Placeholder 2">
-            <a:extLst>
-              <a:ext uri="{FF2B5EF4-FFF2-40B4-BE49-F238E27FC236}">
-                <a16:creationId xmlns:a16="http://schemas.microsoft.com/office/drawing/2014/main" id="{815CC845-7034-43CC-8A9C-914150B30D68}"/>
-              </a:ext>
-            </a:extLst>
-          </p:cNvPr>
-          <p:cNvSpPr>
-            <a:spLocks noGrp="1"/>
-          </p:cNvSpPr>
-          <p:nvPr>
-            <p:ph idx="1"/>
-          </p:nvPr>
-        </p:nvSpPr>
-        <p:spPr/>
-        <p:txBody>
-          <a:bodyPr/>
+            <a:pPr marL="0" marR="0" lvl="0" indent="0" algn="ctr" defTabSz="914400" rtl="0" eaLnBrk="0" fontAlgn="base" latinLnBrk="0" hangingPunct="0">
+              <a:lnSpc>
+                <a:spcPct val="100000"/>
+              </a:lnSpc>
+              <a:spcBef>
+                <a:spcPct val="0"/>
+              </a:spcBef>
+              <a:spcAft>
+                <a:spcPct val="0"/>
+              </a:spcAft>
+              <a:buClrTx/>
+              <a:buSzTx/>
+              <a:buFontTx/>
+              <a:buNone/>
+              <a:tabLst/>
+            </a:pPr>
+            <a:r>
+              <a:rPr kumimoji="0" lang="en-US" altLang="en-US" sz="1400" b="0" i="0" u="none" strike="noStrike" cap="none" normalizeH="0" baseline="0">
+                <a:ln>
+                  <a:noFill/>
+                </a:ln>
+                <a:solidFill>
+                  <a:srgbClr val="E3E3E3"/>
+                </a:solidFill>
+                <a:effectLst/>
+                <a:latin typeface="STIXGeneral-Regular"/>
+              </a:rPr>
+              <a:t>body_mass=2169.27+32.54(bill_length)−298.77(chinstrap)+1094.87(gentoo)+547.37(male)</a:t>
+            </a:r>
+            <a:endParaRPr kumimoji="0" lang="en-US" altLang="en-US" sz="1800" b="0" i="0" u="none" strike="noStrike" cap="none" normalizeH="0" baseline="0">
+              <a:ln>
+                <a:noFill/>
+              </a:ln>
+              <a:solidFill>
+                <a:schemeClr val="tx1"/>
+              </a:solidFill>
+              <a:effectLst/>
+              <a:latin typeface="Arial" panose="020B0604020202020204" pitchFamily="34" charset="0"/>
+            </a:endParaRPr>
+          </a:p>
+        </p:txBody>
+      </p:sp>
+      <p:sp>
+        <p:nvSpPr>
+          <p:cNvPr id="5" name="Rectangle 2">
+            <a:extLst>
+              <a:ext uri="{FF2B5EF4-FFF2-40B4-BE49-F238E27FC236}">
+                <a16:creationId xmlns:a16="http://schemas.microsoft.com/office/drawing/2014/main" id="{EDD2DC1E-BF1A-8B2C-21F3-1F4BC9202B18}"/>
+              </a:ext>
+            </a:extLst>
+          </p:cNvPr>
+          <p:cNvSpPr>
+            <a:spLocks noChangeArrowheads="1"/>
+          </p:cNvSpPr>
+          <p:nvPr/>
+        </p:nvSpPr>
+        <p:spPr bwMode="auto">
+          <a:xfrm>
+            <a:off x="152400" y="152400"/>
+            <a:ext cx="12192000" cy="0"/>
+          </a:xfrm>
+          <a:prstGeom prst="rect">
+            <a:avLst/>
+          </a:prstGeom>
+          <a:noFill/>
+          <a:ln>
+            <a:noFill/>
+          </a:ln>
+          <a:effectLst/>
+          <a:extLst>
+            <a:ext uri="{909E8E84-426E-40DD-AFC4-6F175D3DCCD1}">
+              <a14:hiddenFill xmlns:a14="http://schemas.microsoft.com/office/drawing/2010/main">
+                <a:solidFill>
+                  <a:schemeClr val="accent1"/>
+                </a:solidFill>
+              </a14:hiddenFill>
+            </a:ext>
+            <a:ext uri="{91240B29-F687-4F45-9708-019B960494DF}">
+              <a14:hiddenLine xmlns:a14="http://schemas.microsoft.com/office/drawing/2010/main" w="9525">
+                <a:solidFill>
+                  <a:schemeClr val="tx1"/>
+                </a:solidFill>
+                <a:miter lim="800000"/>
+                <a:headEnd/>
+                <a:tailEnd/>
+              </a14:hiddenLine>
+            </a:ext>
+            <a:ext uri="{AF507438-7753-43E0-B8FC-AC1667EBCBE1}">
+              <a14:hiddenEffects xmlns:a14="http://schemas.microsoft.com/office/drawing/2010/main">
+                <a:effectLst>
+                  <a:outerShdw dist="35921" dir="2700000" algn="ctr" rotWithShape="0">
+                    <a:schemeClr val="bg2"/>
+                  </a:outerShdw>
+                </a:effectLst>
+              </a14:hiddenEffects>
+            </a:ext>
+          </a:extLst>
+        </p:spPr>
+        <p:txBody>
+          <a:bodyPr vert="horz" wrap="none" lIns="91440" tIns="45720" rIns="91440" bIns="45720" numCol="1" anchor="ctr" anchorCtr="0" compatLnSpc="1">
+            <a:prstTxWarp prst="textNoShape">
+              <a:avLst/>
+            </a:prstTxWarp>
+            <a:spAutoFit/>
+          </a:bodyPr>
           <a:lstStyle/>
           <a:p>
-            <a:pPr marL="0" indent="0">
-              <a:buNone/>
+            <a:pPr marL="0" marR="0" lvl="0" indent="0" algn="ctr" defTabSz="914400" rtl="0" eaLnBrk="0" fontAlgn="base" latinLnBrk="0" hangingPunct="0">
+              <a:lnSpc>
+                <a:spcPct val="100000"/>
+              </a:lnSpc>
+              <a:spcBef>
+                <a:spcPct val="0"/>
+              </a:spcBef>
+              <a:spcAft>
+                <a:spcPct val="0"/>
+              </a:spcAft>
+              <a:buClrTx/>
+              <a:buSzTx/>
+              <a:buFontTx/>
+              <a:buNone/>
+              <a:tabLst/>
             </a:pPr>
             <a:r>
-              <a:rPr lang="en-US" dirty="0"/>
-              <a:t>For predicting body mass, the best model of those attempted is </a:t>
-            </a:r>
-          </a:p>
-          <a:p>
-            <a:pPr marL="0" indent="0">
-              <a:buNone/>
+              <a:rPr kumimoji="0" lang="en-US" altLang="en-US" sz="1400" b="0" i="0" u="none" strike="noStrike" cap="none" normalizeH="0" baseline="0">
+                <a:ln>
+                  <a:noFill/>
+                </a:ln>
+                <a:solidFill>
+                  <a:srgbClr val="E3E3E3"/>
+                </a:solidFill>
+                <a:effectLst/>
+                <a:latin typeface="STIXGeneral-Regular"/>
+              </a:rPr>
+              <a:t>body_mass=2169.27+32.54(bill_length)−298.77(chinstrap)+1094.87(gentoo)+547.37(male)</a:t>
+            </a:r>
+            <a:endParaRPr kumimoji="0" lang="en-US" altLang="en-US" sz="1800" b="0" i="0" u="none" strike="noStrike" cap="none" normalizeH="0" baseline="0">
+              <a:ln>
+                <a:noFill/>
+              </a:ln>
+              <a:solidFill>
+                <a:schemeClr val="tx1"/>
+              </a:solidFill>
+              <a:effectLst/>
+              <a:latin typeface="Arial" panose="020B0604020202020204" pitchFamily="34" charset="0"/>
+            </a:endParaRPr>
+          </a:p>
+        </p:txBody>
+      </p:sp>
+      <p:sp>
+        <p:nvSpPr>
+          <p:cNvPr id="6" name="Rectangle 3">
+            <a:extLst>
+              <a:ext uri="{FF2B5EF4-FFF2-40B4-BE49-F238E27FC236}">
+                <a16:creationId xmlns:a16="http://schemas.microsoft.com/office/drawing/2014/main" id="{E46FF9B6-5BD7-F21C-4173-5A887F55C2B7}"/>
+              </a:ext>
+            </a:extLst>
+          </p:cNvPr>
+          <p:cNvSpPr>
+            <a:spLocks noChangeArrowheads="1"/>
+          </p:cNvSpPr>
+          <p:nvPr/>
+        </p:nvSpPr>
+        <p:spPr bwMode="auto">
+          <a:xfrm>
+            <a:off x="304800" y="304800"/>
+            <a:ext cx="12192000" cy="0"/>
+          </a:xfrm>
+          <a:prstGeom prst="rect">
+            <a:avLst/>
+          </a:prstGeom>
+          <a:noFill/>
+          <a:ln>
+            <a:noFill/>
+          </a:ln>
+          <a:effectLst/>
+          <a:extLst>
+            <a:ext uri="{909E8E84-426E-40DD-AFC4-6F175D3DCCD1}">
+              <a14:hiddenFill xmlns:a14="http://schemas.microsoft.com/office/drawing/2010/main">
+                <a:solidFill>
+                  <a:schemeClr val="accent1"/>
+                </a:solidFill>
+              </a14:hiddenFill>
+            </a:ext>
+            <a:ext uri="{91240B29-F687-4F45-9708-019B960494DF}">
+              <a14:hiddenLine xmlns:a14="http://schemas.microsoft.com/office/drawing/2010/main" w="9525">
+                <a:solidFill>
+                  <a:schemeClr val="tx1"/>
+                </a:solidFill>
+                <a:miter lim="800000"/>
+                <a:headEnd/>
+                <a:tailEnd/>
+              </a14:hiddenLine>
+            </a:ext>
+            <a:ext uri="{AF507438-7753-43E0-B8FC-AC1667EBCBE1}">
+              <a14:hiddenEffects xmlns:a14="http://schemas.microsoft.com/office/drawing/2010/main">
+                <a:effectLst>
+                  <a:outerShdw dist="35921" dir="2700000" algn="ctr" rotWithShape="0">
+                    <a:schemeClr val="bg2"/>
+                  </a:outerShdw>
+                </a:effectLst>
+              </a14:hiddenEffects>
+            </a:ext>
+          </a:extLst>
+        </p:spPr>
+        <p:txBody>
+          <a:bodyPr vert="horz" wrap="none" lIns="91440" tIns="45720" rIns="91440" bIns="45720" numCol="1" anchor="ctr" anchorCtr="0" compatLnSpc="1">
+            <a:prstTxWarp prst="textNoShape">
+              <a:avLst/>
+            </a:prstTxWarp>
+            <a:spAutoFit/>
+          </a:bodyPr>
+          <a:lstStyle>
+            <a:lvl1pPr eaLnBrk="0" fontAlgn="base" hangingPunct="0">
+              <a:spcBef>
+                <a:spcPct val="0"/>
+              </a:spcBef>
+              <a:spcAft>
+                <a:spcPct val="0"/>
+              </a:spcAft>
+              <a:defRPr>
+                <a:solidFill>
+                  <a:schemeClr val="tx1"/>
+                </a:solidFill>
+                <a:latin typeface="Arial" panose="020B0604020202020204" pitchFamily="34" charset="0"/>
+              </a:defRPr>
+            </a:lvl1pPr>
+            <a:lvl2pPr eaLnBrk="0" fontAlgn="base" hangingPunct="0">
+              <a:spcBef>
+                <a:spcPct val="0"/>
+              </a:spcBef>
+              <a:spcAft>
+                <a:spcPct val="0"/>
+              </a:spcAft>
+              <a:defRPr>
+                <a:solidFill>
+                  <a:schemeClr val="tx1"/>
+                </a:solidFill>
+                <a:latin typeface="Arial" panose="020B0604020202020204" pitchFamily="34" charset="0"/>
+              </a:defRPr>
+            </a:lvl2pPr>
+            <a:lvl3pPr eaLnBrk="0" fontAlgn="base" hangingPunct="0">
+              <a:spcBef>
+                <a:spcPct val="0"/>
+              </a:spcBef>
+              <a:spcAft>
+                <a:spcPct val="0"/>
+              </a:spcAft>
+              <a:defRPr>
+                <a:solidFill>
+                  <a:schemeClr val="tx1"/>
+                </a:solidFill>
+                <a:latin typeface="Arial" panose="020B0604020202020204" pitchFamily="34" charset="0"/>
+              </a:defRPr>
+            </a:lvl3pPr>
+            <a:lvl4pPr eaLnBrk="0" fontAlgn="base" hangingPunct="0">
+              <a:spcBef>
+                <a:spcPct val="0"/>
+              </a:spcBef>
+              <a:spcAft>
+                <a:spcPct val="0"/>
+              </a:spcAft>
+              <a:defRPr>
+                <a:solidFill>
+                  <a:schemeClr val="tx1"/>
+                </a:solidFill>
+                <a:latin typeface="Arial" panose="020B0604020202020204" pitchFamily="34" charset="0"/>
+              </a:defRPr>
+            </a:lvl4pPr>
+            <a:lvl5pPr eaLnBrk="0" fontAlgn="base" hangingPunct="0">
+              <a:spcBef>
+                <a:spcPct val="0"/>
+              </a:spcBef>
+              <a:spcAft>
+                <a:spcPct val="0"/>
+              </a:spcAft>
+              <a:defRPr>
+                <a:solidFill>
+                  <a:schemeClr val="tx1"/>
+                </a:solidFill>
+                <a:latin typeface="Arial" panose="020B0604020202020204" pitchFamily="34" charset="0"/>
+              </a:defRPr>
+            </a:lvl5pPr>
+            <a:lvl6pPr eaLnBrk="0" fontAlgn="base" hangingPunct="0">
+              <a:spcBef>
+                <a:spcPct val="0"/>
+              </a:spcBef>
+              <a:spcAft>
+                <a:spcPct val="0"/>
+              </a:spcAft>
+              <a:defRPr>
+                <a:solidFill>
+                  <a:schemeClr val="tx1"/>
+                </a:solidFill>
+                <a:latin typeface="Arial" panose="020B0604020202020204" pitchFamily="34" charset="0"/>
+              </a:defRPr>
+            </a:lvl6pPr>
+            <a:lvl7pPr eaLnBrk="0" fontAlgn="base" hangingPunct="0">
+              <a:spcBef>
+                <a:spcPct val="0"/>
+              </a:spcBef>
+              <a:spcAft>
+                <a:spcPct val="0"/>
+              </a:spcAft>
+              <a:defRPr>
+                <a:solidFill>
+                  <a:schemeClr val="tx1"/>
+                </a:solidFill>
+                <a:latin typeface="Arial" panose="020B0604020202020204" pitchFamily="34" charset="0"/>
+              </a:defRPr>
+            </a:lvl7pPr>
+            <a:lvl8pPr eaLnBrk="0" fontAlgn="base" hangingPunct="0">
+              <a:spcBef>
+                <a:spcPct val="0"/>
+              </a:spcBef>
+              <a:spcAft>
+                <a:spcPct val="0"/>
+              </a:spcAft>
+              <a:defRPr>
+                <a:solidFill>
+                  <a:schemeClr val="tx1"/>
+                </a:solidFill>
+                <a:latin typeface="Arial" panose="020B0604020202020204" pitchFamily="34" charset="0"/>
+              </a:defRPr>
+            </a:lvl8pPr>
+            <a:lvl9pPr eaLnBrk="0" fontAlgn="base" hangingPunct="0">
+              <a:spcBef>
+                <a:spcPct val="0"/>
+              </a:spcBef>
+              <a:spcAft>
+                <a:spcPct val="0"/>
+              </a:spcAft>
+              <a:defRPr>
+                <a:solidFill>
+                  <a:schemeClr val="tx1"/>
+                </a:solidFill>
+                <a:latin typeface="Arial" panose="020B0604020202020204" pitchFamily="34" charset="0"/>
+              </a:defRPr>
+            </a:lvl9pPr>
+          </a:lstStyle>
+          <a:p>
+            <a:pPr marL="0" marR="0" lvl="0" indent="0" algn="l" defTabSz="914400" rtl="0" eaLnBrk="0" fontAlgn="base" latinLnBrk="0" hangingPunct="0">
+              <a:lnSpc>
+                <a:spcPct val="100000"/>
+              </a:lnSpc>
+              <a:spcBef>
+                <a:spcPct val="0"/>
+              </a:spcBef>
+              <a:spcAft>
+                <a:spcPct val="0"/>
+              </a:spcAft>
+              <a:buClrTx/>
+              <a:buSzTx/>
+              <a:buFontTx/>
+              <a:buNone/>
+              <a:tabLst/>
             </a:pPr>
             <a:r>
-              <a:rPr lang="en-US" dirty="0" err="1"/>
-              <a:t>body_mass_g</a:t>
-            </a:r>
-            <a:r>
-              <a:rPr lang="en-US" dirty="0"/>
-              <a:t> ~ 2169.27 + 32.54(</a:t>
-            </a:r>
-            <a:r>
-              <a:rPr lang="en-US" dirty="0" err="1"/>
-              <a:t>bill_length_mm</a:t>
-            </a:r>
-            <a:r>
-              <a:rPr lang="en-US" dirty="0"/>
-              <a:t>) - 298.77(chinstrap) + 1094.87(gentoo) + 547.37(male) </a:t>
-            </a:r>
-          </a:p>
-          <a:p>
-            <a:pPr marL="0" indent="0">
-              <a:buNone/>
+              <a:rPr kumimoji="0" lang="en-US" altLang="en-US" sz="1400" b="0" i="0" u="none" strike="noStrike" cap="none" normalizeH="0" baseline="0">
+                <a:ln>
+                  <a:noFill/>
+                </a:ln>
+                <a:solidFill>
+                  <a:srgbClr val="E3E3E3"/>
+                </a:solidFill>
+                <a:effectLst/>
+                <a:latin typeface="STIXGeneral-Italic"/>
+              </a:rPr>
+              <a:t>𝑅</a:t>
+            </a:r>
+            <a:r>
+              <a:rPr kumimoji="0" lang="en-US" altLang="en-US" sz="900" b="0" i="0" u="none" strike="noStrike" cap="none" normalizeH="0" baseline="0">
+                <a:ln>
+                  <a:noFill/>
+                </a:ln>
+                <a:solidFill>
+                  <a:srgbClr val="E3E3E3"/>
+                </a:solidFill>
+                <a:effectLst/>
+                <a:latin typeface="STIXGeneral-Regular"/>
+              </a:rPr>
+              <a:t>2</a:t>
+            </a:r>
+            <a:endParaRPr kumimoji="0" lang="en-US" altLang="en-US" sz="1800" b="0" i="0" u="none" strike="noStrike" cap="none" normalizeH="0" baseline="0">
+              <a:ln>
+                <a:noFill/>
+              </a:ln>
+              <a:solidFill>
+                <a:schemeClr val="tx1"/>
+              </a:solidFill>
+              <a:effectLst/>
+              <a:latin typeface="Arial" panose="020B0604020202020204" pitchFamily="34" charset="0"/>
+            </a:endParaRPr>
+          </a:p>
+        </p:txBody>
+      </p:sp>
+      <p:sp>
+        <p:nvSpPr>
+          <p:cNvPr id="7" name="Rectangle 4">
+            <a:extLst>
+              <a:ext uri="{FF2B5EF4-FFF2-40B4-BE49-F238E27FC236}">
+                <a16:creationId xmlns:a16="http://schemas.microsoft.com/office/drawing/2014/main" id="{CB607C89-5C10-3EE0-06F6-EEF34440AF0F}"/>
+              </a:ext>
+            </a:extLst>
+          </p:cNvPr>
+          <p:cNvSpPr>
+            <a:spLocks noChangeArrowheads="1"/>
+          </p:cNvSpPr>
+          <p:nvPr/>
+        </p:nvSpPr>
+        <p:spPr bwMode="auto">
+          <a:xfrm>
+            <a:off x="457200" y="457200"/>
+            <a:ext cx="12192000" cy="0"/>
+          </a:xfrm>
+          <a:prstGeom prst="rect">
+            <a:avLst/>
+          </a:prstGeom>
+          <a:noFill/>
+          <a:ln>
+            <a:noFill/>
+          </a:ln>
+          <a:effectLst/>
+          <a:extLst>
+            <a:ext uri="{909E8E84-426E-40DD-AFC4-6F175D3DCCD1}">
+              <a14:hiddenFill xmlns:a14="http://schemas.microsoft.com/office/drawing/2010/main">
+                <a:solidFill>
+                  <a:schemeClr val="accent1"/>
+                </a:solidFill>
+              </a14:hiddenFill>
+            </a:ext>
+            <a:ext uri="{91240B29-F687-4F45-9708-019B960494DF}">
+              <a14:hiddenLine xmlns:a14="http://schemas.microsoft.com/office/drawing/2010/main" w="9525">
+                <a:solidFill>
+                  <a:schemeClr val="tx1"/>
+                </a:solidFill>
+                <a:miter lim="800000"/>
+                <a:headEnd/>
+                <a:tailEnd/>
+              </a14:hiddenLine>
+            </a:ext>
+            <a:ext uri="{AF507438-7753-43E0-B8FC-AC1667EBCBE1}">
+              <a14:hiddenEffects xmlns:a14="http://schemas.microsoft.com/office/drawing/2010/main">
+                <a:effectLst>
+                  <a:outerShdw dist="35921" dir="2700000" algn="ctr" rotWithShape="0">
+                    <a:schemeClr val="bg2"/>
+                  </a:outerShdw>
+                </a:effectLst>
+              </a14:hiddenEffects>
+            </a:ext>
+          </a:extLst>
+        </p:spPr>
+        <p:txBody>
+          <a:bodyPr vert="horz" wrap="none" lIns="91440" tIns="45720" rIns="91440" bIns="45720" numCol="1" anchor="ctr" anchorCtr="0" compatLnSpc="1">
+            <a:prstTxWarp prst="textNoShape">
+              <a:avLst/>
+            </a:prstTxWarp>
+            <a:spAutoFit/>
+          </a:bodyPr>
+          <a:lstStyle/>
+          <a:p>
+            <a:pPr marL="0" marR="0" lvl="0" indent="0" algn="l" defTabSz="914400" rtl="0" eaLnBrk="0" fontAlgn="base" latinLnBrk="0" hangingPunct="0">
+              <a:lnSpc>
+                <a:spcPct val="100000"/>
+              </a:lnSpc>
+              <a:spcBef>
+                <a:spcPct val="0"/>
+              </a:spcBef>
+              <a:spcAft>
+                <a:spcPct val="0"/>
+              </a:spcAft>
+              <a:buClrTx/>
+              <a:buSzTx/>
+              <a:buFontTx/>
+              <a:buNone/>
+              <a:tabLst/>
             </a:pPr>
             <a:r>
-              <a:rPr lang="en-US" sz="2400" dirty="0"/>
-              <a:t>Where 1 indicates True for categorical variables chinstrap, gentoo, and male, and 0 indicates False. </a:t>
-            </a:r>
-          </a:p>
-          <a:p>
-            <a:pPr marL="0" indent="0">
-              <a:buNone/>
+              <a:rPr kumimoji="0" lang="en-US" altLang="en-US" sz="1400" b="0" i="0" u="none" strike="noStrike" cap="none" normalizeH="0" baseline="0">
+                <a:ln>
+                  <a:noFill/>
+                </a:ln>
+                <a:solidFill>
+                  <a:srgbClr val="E3E3E3"/>
+                </a:solidFill>
+                <a:effectLst/>
+                <a:latin typeface="STIXGeneral-Italic"/>
+              </a:rPr>
+              <a:t>𝑅</a:t>
+            </a:r>
+            <a:r>
+              <a:rPr kumimoji="0" lang="en-US" altLang="en-US" sz="900" b="0" i="0" u="none" strike="noStrike" cap="none" normalizeH="0" baseline="0">
+                <a:ln>
+                  <a:noFill/>
+                </a:ln>
+                <a:solidFill>
+                  <a:srgbClr val="E3E3E3"/>
+                </a:solidFill>
+                <a:effectLst/>
+                <a:latin typeface="STIXGeneral-Regular"/>
+              </a:rPr>
+              <a:t>2</a:t>
+            </a:r>
+            <a:endParaRPr kumimoji="0" lang="en-US" altLang="en-US" sz="1800" b="0" i="0" u="none" strike="noStrike" cap="none" normalizeH="0" baseline="0">
+              <a:ln>
+                <a:noFill/>
+              </a:ln>
+              <a:solidFill>
+                <a:schemeClr val="tx1"/>
+              </a:solidFill>
+              <a:effectLst/>
+              <a:latin typeface="Arial" panose="020B0604020202020204" pitchFamily="34" charset="0"/>
+            </a:endParaRPr>
+          </a:p>
+        </p:txBody>
+      </p:sp>
+      <p:sp>
+        <p:nvSpPr>
+          <p:cNvPr id="8" name="Rectangle 5">
+            <a:extLst>
+              <a:ext uri="{FF2B5EF4-FFF2-40B4-BE49-F238E27FC236}">
+                <a16:creationId xmlns:a16="http://schemas.microsoft.com/office/drawing/2014/main" id="{C170B78C-21D9-97FF-E622-C68B6E871BEB}"/>
+              </a:ext>
+            </a:extLst>
+          </p:cNvPr>
+          <p:cNvSpPr>
+            <a:spLocks noChangeArrowheads="1"/>
+          </p:cNvSpPr>
+          <p:nvPr/>
+        </p:nvSpPr>
+        <p:spPr bwMode="auto">
+          <a:xfrm>
+            <a:off x="609600" y="609600"/>
+            <a:ext cx="12192000" cy="0"/>
+          </a:xfrm>
+          <a:prstGeom prst="rect">
+            <a:avLst/>
+          </a:prstGeom>
+          <a:noFill/>
+          <a:ln>
+            <a:noFill/>
+          </a:ln>
+          <a:effectLst/>
+          <a:extLst>
+            <a:ext uri="{909E8E84-426E-40DD-AFC4-6F175D3DCCD1}">
+              <a14:hiddenFill xmlns:a14="http://schemas.microsoft.com/office/drawing/2010/main">
+                <a:solidFill>
+                  <a:schemeClr val="accent1"/>
+                </a:solidFill>
+              </a14:hiddenFill>
+            </a:ext>
+            <a:ext uri="{91240B29-F687-4F45-9708-019B960494DF}">
+              <a14:hiddenLine xmlns:a14="http://schemas.microsoft.com/office/drawing/2010/main" w="9525">
+                <a:solidFill>
+                  <a:schemeClr val="tx1"/>
+                </a:solidFill>
+                <a:miter lim="800000"/>
+                <a:headEnd/>
+                <a:tailEnd/>
+              </a14:hiddenLine>
+            </a:ext>
+            <a:ext uri="{AF507438-7753-43E0-B8FC-AC1667EBCBE1}">
+              <a14:hiddenEffects xmlns:a14="http://schemas.microsoft.com/office/drawing/2010/main">
+                <a:effectLst>
+                  <a:outerShdw dist="35921" dir="2700000" algn="ctr" rotWithShape="0">
+                    <a:schemeClr val="bg2"/>
+                  </a:outerShdw>
+                </a:effectLst>
+              </a14:hiddenEffects>
+            </a:ext>
+          </a:extLst>
+        </p:spPr>
+        <p:txBody>
+          <a:bodyPr vert="horz" wrap="none" lIns="91440" tIns="45720" rIns="91440" bIns="45720" numCol="1" anchor="ctr" anchorCtr="0" compatLnSpc="1">
+            <a:prstTxWarp prst="textNoShape">
+              <a:avLst/>
+            </a:prstTxWarp>
+            <a:spAutoFit/>
+          </a:bodyPr>
+          <a:lstStyle>
+            <a:lvl1pPr eaLnBrk="0" fontAlgn="base" hangingPunct="0">
+              <a:spcBef>
+                <a:spcPct val="0"/>
+              </a:spcBef>
+              <a:spcAft>
+                <a:spcPct val="0"/>
+              </a:spcAft>
+              <a:defRPr>
+                <a:solidFill>
+                  <a:schemeClr val="tx1"/>
+                </a:solidFill>
+                <a:latin typeface="Arial" panose="020B0604020202020204" pitchFamily="34" charset="0"/>
+              </a:defRPr>
+            </a:lvl1pPr>
+            <a:lvl2pPr eaLnBrk="0" fontAlgn="base" hangingPunct="0">
+              <a:spcBef>
+                <a:spcPct val="0"/>
+              </a:spcBef>
+              <a:spcAft>
+                <a:spcPct val="0"/>
+              </a:spcAft>
+              <a:defRPr>
+                <a:solidFill>
+                  <a:schemeClr val="tx1"/>
+                </a:solidFill>
+                <a:latin typeface="Arial" panose="020B0604020202020204" pitchFamily="34" charset="0"/>
+              </a:defRPr>
+            </a:lvl2pPr>
+            <a:lvl3pPr eaLnBrk="0" fontAlgn="base" hangingPunct="0">
+              <a:spcBef>
+                <a:spcPct val="0"/>
+              </a:spcBef>
+              <a:spcAft>
+                <a:spcPct val="0"/>
+              </a:spcAft>
+              <a:defRPr>
+                <a:solidFill>
+                  <a:schemeClr val="tx1"/>
+                </a:solidFill>
+                <a:latin typeface="Arial" panose="020B0604020202020204" pitchFamily="34" charset="0"/>
+              </a:defRPr>
+            </a:lvl3pPr>
+            <a:lvl4pPr eaLnBrk="0" fontAlgn="base" hangingPunct="0">
+              <a:spcBef>
+                <a:spcPct val="0"/>
+              </a:spcBef>
+              <a:spcAft>
+                <a:spcPct val="0"/>
+              </a:spcAft>
+              <a:defRPr>
+                <a:solidFill>
+                  <a:schemeClr val="tx1"/>
+                </a:solidFill>
+                <a:latin typeface="Arial" panose="020B0604020202020204" pitchFamily="34" charset="0"/>
+              </a:defRPr>
+            </a:lvl4pPr>
+            <a:lvl5pPr eaLnBrk="0" fontAlgn="base" hangingPunct="0">
+              <a:spcBef>
+                <a:spcPct val="0"/>
+              </a:spcBef>
+              <a:spcAft>
+                <a:spcPct val="0"/>
+              </a:spcAft>
+              <a:defRPr>
+                <a:solidFill>
+                  <a:schemeClr val="tx1"/>
+                </a:solidFill>
+                <a:latin typeface="Arial" panose="020B0604020202020204" pitchFamily="34" charset="0"/>
+              </a:defRPr>
+            </a:lvl5pPr>
+            <a:lvl6pPr eaLnBrk="0" fontAlgn="base" hangingPunct="0">
+              <a:spcBef>
+                <a:spcPct val="0"/>
+              </a:spcBef>
+              <a:spcAft>
+                <a:spcPct val="0"/>
+              </a:spcAft>
+              <a:defRPr>
+                <a:solidFill>
+                  <a:schemeClr val="tx1"/>
+                </a:solidFill>
+                <a:latin typeface="Arial" panose="020B0604020202020204" pitchFamily="34" charset="0"/>
+              </a:defRPr>
+            </a:lvl6pPr>
+            <a:lvl7pPr eaLnBrk="0" fontAlgn="base" hangingPunct="0">
+              <a:spcBef>
+                <a:spcPct val="0"/>
+              </a:spcBef>
+              <a:spcAft>
+                <a:spcPct val="0"/>
+              </a:spcAft>
+              <a:defRPr>
+                <a:solidFill>
+                  <a:schemeClr val="tx1"/>
+                </a:solidFill>
+                <a:latin typeface="Arial" panose="020B0604020202020204" pitchFamily="34" charset="0"/>
+              </a:defRPr>
+            </a:lvl7pPr>
+            <a:lvl8pPr eaLnBrk="0" fontAlgn="base" hangingPunct="0">
+              <a:spcBef>
+                <a:spcPct val="0"/>
+              </a:spcBef>
+              <a:spcAft>
+                <a:spcPct val="0"/>
+              </a:spcAft>
+              <a:defRPr>
+                <a:solidFill>
+                  <a:schemeClr val="tx1"/>
+                </a:solidFill>
+                <a:latin typeface="Arial" panose="020B0604020202020204" pitchFamily="34" charset="0"/>
+              </a:defRPr>
+            </a:lvl8pPr>
+            <a:lvl9pPr eaLnBrk="0" fontAlgn="base" hangingPunct="0">
+              <a:spcBef>
+                <a:spcPct val="0"/>
+              </a:spcBef>
+              <a:spcAft>
+                <a:spcPct val="0"/>
+              </a:spcAft>
+              <a:defRPr>
+                <a:solidFill>
+                  <a:schemeClr val="tx1"/>
+                </a:solidFill>
+                <a:latin typeface="Arial" panose="020B0604020202020204" pitchFamily="34" charset="0"/>
+              </a:defRPr>
+            </a:lvl9pPr>
+          </a:lstStyle>
+          <a:p>
+            <a:pPr marL="0" marR="0" lvl="0" indent="0" algn="l" defTabSz="914400" rtl="0" eaLnBrk="0" fontAlgn="base" latinLnBrk="0" hangingPunct="0">
+              <a:lnSpc>
+                <a:spcPct val="100000"/>
+              </a:lnSpc>
+              <a:spcBef>
+                <a:spcPct val="0"/>
+              </a:spcBef>
+              <a:spcAft>
+                <a:spcPct val="0"/>
+              </a:spcAft>
+              <a:buClrTx/>
+              <a:buSzTx/>
+              <a:buFontTx/>
+              <a:buNone/>
+              <a:tabLst/>
             </a:pPr>
-            <a:br>
-              <a:rPr lang="en-US" dirty="0"/>
-            </a:br>
-            <a:endParaRPr lang="en-US" dirty="0"/>
-          </a:p>
-          <a:p>
-            <a:pPr marL="0" indent="0">
-              <a:buNone/>
-            </a:pPr>
-            <a:r>
-              <a:rPr lang="en-US" sz="2400" dirty="0"/>
-              <a:t>This model has the lowest p-values across variables, the highest R^2, and the lowest MSE.</a:t>
-            </a:r>
-          </a:p>
-          <a:p>
-            <a:endParaRPr lang="en-US" dirty="0"/>
+            <a:r>
+              <a:rPr kumimoji="0" lang="en-US" altLang="en-US" sz="1200" b="0" i="0" u="none" strike="noStrike" cap="none" normalizeH="0" baseline="0">
+                <a:ln>
+                  <a:noFill/>
+                </a:ln>
+                <a:solidFill>
+                  <a:srgbClr val="E3E3E3"/>
+                </a:solidFill>
+                <a:effectLst/>
+                <a:latin typeface="Google Sans Text"/>
+              </a:rPr>
+              <a:t> </a:t>
+            </a:r>
+            <a:r>
+              <a:rPr kumimoji="0" lang="en-US" altLang="en-US" sz="1400" b="0" i="0" u="none" strike="noStrike" cap="none" normalizeH="0" baseline="0">
+                <a:ln>
+                  <a:noFill/>
+                </a:ln>
+                <a:solidFill>
+                  <a:srgbClr val="E3E3E3"/>
+                </a:solidFill>
+                <a:effectLst/>
+                <a:latin typeface="STIXGeneral-Italic"/>
+              </a:rPr>
+              <a:t>𝑅</a:t>
+            </a:r>
+            <a:r>
+              <a:rPr kumimoji="0" lang="en-US" altLang="en-US" sz="900" b="0" i="0" u="none" strike="noStrike" cap="none" normalizeH="0" baseline="0">
+                <a:ln>
+                  <a:noFill/>
+                </a:ln>
+                <a:solidFill>
+                  <a:srgbClr val="E3E3E3"/>
+                </a:solidFill>
+                <a:effectLst/>
+                <a:latin typeface="STIXGeneral-Regular"/>
+              </a:rPr>
+              <a:t>2</a:t>
+            </a:r>
+            <a:r>
+              <a:rPr kumimoji="0" lang="en-US" altLang="en-US" sz="1200" b="0" i="0" u="none" strike="noStrike" cap="none" normalizeH="0" baseline="0">
+                <a:ln>
+                  <a:noFill/>
+                </a:ln>
+                <a:solidFill>
+                  <a:srgbClr val="E3E3E3"/>
+                </a:solidFill>
+                <a:effectLst/>
+                <a:latin typeface="Google Sans Text"/>
+              </a:rPr>
+              <a:t> </a:t>
+            </a:r>
+            <a:endParaRPr kumimoji="0" lang="en-US" altLang="en-US" sz="1800" b="0" i="0" u="none" strike="noStrike" cap="none" normalizeH="0" baseline="0">
+              <a:ln>
+                <a:noFill/>
+              </a:ln>
+              <a:solidFill>
+                <a:schemeClr val="tx1"/>
+              </a:solidFill>
+              <a:effectLst/>
+              <a:latin typeface="Arial" panose="020B0604020202020204" pitchFamily="34" charset="0"/>
+            </a:endParaRPr>
           </a:p>
         </p:txBody>
       </p:sp>
@@ -4558,7 +5808,7 @@
 </p:sld>
 </file>
 
-<file path=ppt/slides/slide6.xml><?xml version="1.0" encoding="utf-8"?>
+<file path=ppt/slides/slide9.xml><?xml version="1.0" encoding="utf-8"?>
 <p:sld xmlns:a="http://schemas.openxmlformats.org/drawingml/2006/main" xmlns:r="http://schemas.openxmlformats.org/officeDocument/2006/relationships" xmlns:p="http://schemas.openxmlformats.org/presentationml/2006/main">
   <p:cSld>
     <p:spTree>
@@ -4580,7 +5830,7 @@
           <p:cNvPr id="2" name="Title 1">
             <a:extLst>
               <a:ext uri="{FF2B5EF4-FFF2-40B4-BE49-F238E27FC236}">
-                <a16:creationId xmlns:a16="http://schemas.microsoft.com/office/drawing/2014/main" id="{261A6AF4-D4ED-CD08-857A-97508DAF654D}"/>
+                <a16:creationId xmlns:a16="http://schemas.microsoft.com/office/drawing/2014/main" id="{632EDE05-771B-1696-6DDF-5BF0EAB42F13}"/>
               </a:ext>
             </a:extLst>
           </p:cNvPr>
@@ -4591,12 +5841,20 @@
             <p:ph type="title"/>
           </p:nvPr>
         </p:nvSpPr>
-        <p:spPr/>
+        <p:spPr>
+          <a:xfrm>
+            <a:off x="838200" y="365125"/>
+            <a:ext cx="10515600" cy="969405"/>
+          </a:xfrm>
+        </p:spPr>
         <p:txBody>
           <a:bodyPr/>
           <a:lstStyle/>
           <a:p>
-            <a:endParaRPr lang="en-US"/>
+            <a:r>
+              <a:rPr lang="en-US" dirty="0"/>
+              <a:t>References:</a:t>
+            </a:r>
           </a:p>
         </p:txBody>
       </p:sp>
@@ -4605,7 +5863,7 @@
           <p:cNvPr id="3" name="Content Placeholder 2">
             <a:extLst>
               <a:ext uri="{FF2B5EF4-FFF2-40B4-BE49-F238E27FC236}">
-                <a16:creationId xmlns:a16="http://schemas.microsoft.com/office/drawing/2014/main" id="{77CFFEB3-37D5-4C2B-FDA9-7AEA5BB27C58}"/>
+                <a16:creationId xmlns:a16="http://schemas.microsoft.com/office/drawing/2014/main" id="{88707A21-41DB-4C76-E93E-567E7AF65A52}"/>
               </a:ext>
             </a:extLst>
           </p:cNvPr>
@@ -4616,19 +5874,240 @@
             <p:ph idx="1"/>
           </p:nvPr>
         </p:nvSpPr>
-        <p:spPr/>
-        <p:txBody>
-          <a:bodyPr/>
+        <p:spPr>
+          <a:xfrm>
+            <a:off x="838200" y="1334530"/>
+            <a:ext cx="10515600" cy="4842433"/>
+          </a:xfrm>
+        </p:spPr>
+        <p:txBody>
+          <a:bodyPr>
+            <a:normAutofit fontScale="62500" lnSpcReduction="20000"/>
+          </a:bodyPr>
           <a:lstStyle/>
           <a:p>
-            <a:endParaRPr lang="en-US"/>
+            <a:pPr marL="0" indent="0">
+              <a:buNone/>
+            </a:pPr>
+            <a:endParaRPr lang="en-US" dirty="0"/>
+          </a:p>
+          <a:p>
+            <a:r>
+              <a:rPr lang="en-US" sz="2900" dirty="0"/>
+              <a:t>Horst AM, Hill AP, Gorman KB (2020). </a:t>
+            </a:r>
+            <a:r>
+              <a:rPr lang="en-US" sz="2900" dirty="0" err="1"/>
+              <a:t>palmerpenguins</a:t>
+            </a:r>
+            <a:r>
+              <a:rPr lang="en-US" sz="2900" dirty="0"/>
+              <a:t>: Palmer</a:t>
+            </a:r>
+          </a:p>
+          <a:p>
+            <a:endParaRPr lang="en-US" sz="2900" dirty="0"/>
+          </a:p>
+          <a:p>
+            <a:r>
+              <a:rPr lang="en-US" sz="2900" dirty="0"/>
+              <a:t>Archipelago (Antarctica) penguin data. R package version 0.1.0.</a:t>
+            </a:r>
+          </a:p>
+          <a:p>
+            <a:endParaRPr lang="en-US" sz="2900" dirty="0"/>
+          </a:p>
+          <a:p>
+            <a:r>
+              <a:rPr lang="en-US" sz="2900" dirty="0"/>
+              <a:t>https://</a:t>
+            </a:r>
+            <a:r>
+              <a:rPr lang="en-US" sz="2900" dirty="0" err="1"/>
+              <a:t>allisonhorst</a:t>
+            </a:r>
+            <a:r>
+              <a:rPr lang="en-US" dirty="0" err="1"/>
+              <a:t>.github.io</a:t>
+            </a:r>
+            <a:r>
+              <a:rPr lang="en-US" dirty="0"/>
+              <a:t>/</a:t>
+            </a:r>
+            <a:r>
+              <a:rPr lang="en-US" dirty="0" err="1"/>
+              <a:t>palmerpenguins</a:t>
+            </a:r>
+            <a:r>
+              <a:rPr lang="en-US" dirty="0"/>
+              <a:t>/. </a:t>
+            </a:r>
+            <a:r>
+              <a:rPr lang="en-US" dirty="0" err="1"/>
+              <a:t>doi</a:t>
+            </a:r>
+            <a:r>
+              <a:rPr lang="en-US" dirty="0"/>
+              <a:t>: 10.5281/zenodo.3960218.</a:t>
+            </a:r>
+          </a:p>
+          <a:p>
+            <a:pPr marL="0" indent="0">
+              <a:buNone/>
+            </a:pPr>
+            <a:endParaRPr lang="en-US" dirty="0"/>
+          </a:p>
+          <a:p>
+            <a:r>
+              <a:rPr lang="en-US" dirty="0"/>
+              <a:t>https://</a:t>
+            </a:r>
+            <a:r>
+              <a:rPr lang="en-US" dirty="0" err="1"/>
+              <a:t>allisonhorst.github.io</a:t>
+            </a:r>
+            <a:r>
+              <a:rPr lang="en-US" dirty="0"/>
+              <a:t>/</a:t>
+            </a:r>
+            <a:r>
+              <a:rPr lang="en-US" dirty="0" err="1"/>
+              <a:t>palmerpenguins</a:t>
+            </a:r>
+            <a:r>
+              <a:rPr lang="en-US" dirty="0"/>
+              <a:t>/reference/</a:t>
+            </a:r>
+            <a:r>
+              <a:rPr lang="en-US" dirty="0" err="1"/>
+              <a:t>penguins_raw.html</a:t>
+            </a:r>
+            <a:br>
+              <a:rPr lang="en-US" dirty="0"/>
+            </a:br>
+            <a:endParaRPr lang="en-US" dirty="0"/>
+          </a:p>
+          <a:p>
+            <a:r>
+              <a:rPr lang="en-US" dirty="0"/>
+              <a:t>https://</a:t>
+            </a:r>
+            <a:r>
+              <a:rPr lang="en-US" dirty="0" err="1"/>
+              <a:t>journals.plos.org</a:t>
+            </a:r>
+            <a:r>
+              <a:rPr lang="en-US" dirty="0"/>
+              <a:t>/</a:t>
+            </a:r>
+            <a:r>
+              <a:rPr lang="en-US" dirty="0" err="1"/>
+              <a:t>plosone</a:t>
+            </a:r>
+            <a:r>
+              <a:rPr lang="en-US" dirty="0"/>
+              <a:t>/</a:t>
+            </a:r>
+            <a:r>
+              <a:rPr lang="en-US" dirty="0" err="1"/>
+              <a:t>article?id</a:t>
+            </a:r>
+            <a:r>
+              <a:rPr lang="en-US" dirty="0"/>
+              <a:t>=10.1371/journal.pone.0090081</a:t>
+            </a:r>
+            <a:br>
+              <a:rPr lang="en-US" dirty="0"/>
+            </a:br>
+            <a:endParaRPr lang="en-US" dirty="0"/>
+          </a:p>
+          <a:p>
+            <a:r>
+              <a:rPr lang="en-US" dirty="0"/>
+              <a:t>https://</a:t>
+            </a:r>
+            <a:r>
+              <a:rPr lang="en-US" dirty="0" err="1"/>
+              <a:t>allisonhorst.github.io</a:t>
+            </a:r>
+            <a:r>
+              <a:rPr lang="en-US" dirty="0"/>
+              <a:t>/</a:t>
+            </a:r>
+            <a:r>
+              <a:rPr lang="en-US" dirty="0" err="1"/>
+              <a:t>palmerpenguins</a:t>
+            </a:r>
+            <a:r>
+              <a:rPr lang="en-US" dirty="0"/>
+              <a:t>/</a:t>
+            </a:r>
+            <a:br>
+              <a:rPr lang="en-US" dirty="0"/>
+            </a:br>
+            <a:endParaRPr lang="en-US" dirty="0"/>
+          </a:p>
+          <a:p>
+            <a:r>
+              <a:rPr lang="en-US" dirty="0"/>
+              <a:t>https://</a:t>
+            </a:r>
+            <a:r>
+              <a:rPr lang="en-US" dirty="0" err="1"/>
+              <a:t>www.uaf.edu</a:t>
+            </a:r>
+            <a:r>
+              <a:rPr lang="en-US" dirty="0"/>
+              <a:t>/</a:t>
+            </a:r>
+            <a:r>
+              <a:rPr lang="en-US" dirty="0" err="1"/>
+              <a:t>cfos</a:t>
+            </a:r>
+            <a:r>
+              <a:rPr lang="en-US" dirty="0"/>
+              <a:t>/people/faculty/detail/</a:t>
+            </a:r>
+            <a:r>
+              <a:rPr lang="en-US" dirty="0" err="1"/>
+              <a:t>kristen-gorman.php</a:t>
+            </a:r>
+            <a:br>
+              <a:rPr lang="en-US" dirty="0"/>
+            </a:br>
+            <a:endParaRPr lang="en-US" dirty="0"/>
+          </a:p>
+          <a:p>
+            <a:r>
+              <a:rPr lang="en-US" dirty="0"/>
+              <a:t>https://</a:t>
+            </a:r>
+            <a:r>
+              <a:rPr lang="en-US" dirty="0" err="1"/>
+              <a:t>deepwiki.com</a:t>
+            </a:r>
+            <a:r>
+              <a:rPr lang="en-US" dirty="0"/>
+              <a:t>/</a:t>
+            </a:r>
+            <a:r>
+              <a:rPr lang="en-US" dirty="0" err="1"/>
+              <a:t>mwaskom</a:t>
+            </a:r>
+            <a:r>
+              <a:rPr lang="en-US" dirty="0"/>
+              <a:t>/seaborn-data/5.3-palmer-penguins</a:t>
+            </a:r>
+          </a:p>
+          <a:p>
+            <a:endParaRPr lang="en-US" dirty="0"/>
           </a:p>
         </p:txBody>
       </p:sp>
     </p:spTree>
     <p:extLst>
       <p:ext uri="{BB962C8B-B14F-4D97-AF65-F5344CB8AC3E}">
-        <p14:creationId xmlns:p14="http://schemas.microsoft.com/office/powerpoint/2010/main" val="136552801"/>
+        <p14:creationId xmlns:p14="http://schemas.microsoft.com/office/powerpoint/2010/main" val="2602037187"/>
       </p:ext>
     </p:extLst>
   </p:cSld>
